--- a/Clase_9/PPT/Clase09_LDA_Aplicado.pptx
+++ b/Clase_9/PPT/Clase09_LDA_Aplicado.pptx
@@ -4,6 +4,9 @@
   <p:sldMasterIdLst>
     <p:sldMasterId id="2147483648" r:id="rId1"/>
   </p:sldMasterIdLst>
+  <p:notesMasterIdLst>
+    <p:notesMasterId r:id="rId9"/>
+  </p:notesMasterIdLst>
   <p:sldIdLst>
     <p:sldId id="256" r:id="rId2"/>
     <p:sldId id="257" r:id="rId3"/>
@@ -13,10 +16,7 @@
     <p:sldId id="261" r:id="rId7"/>
     <p:sldId id="262" r:id="rId8"/>
   </p:sldIdLst>
-  <p:notesMasterIdLst>
-    <p:notesMasterId r:id="rId9"/>
-  </p:notesMasterIdLst>
-  <p:sldSz cx="9144000" cy="5143500"/>
+  <p:sldSz cx="9144000" cy="5143500" type="screen16x9"/>
   <p:notesSz cx="5143500" cy="9144000"/>
   <p:defaultTextStyle>
     <a:lvl1pPr marL="0" algn="l" defTabSz="914400" rtl="0" eaLnBrk="1" latinLnBrk="0" hangingPunct="1">
@@ -110,6 +110,11 @@
       </a:defRPr>
     </a:lvl9pPr>
   </p:defaultTextStyle>
+  <p:extLst>
+    <p:ext uri="{EFAFB233-063F-42B5-8137-9DF3F51BA10A}">
+      <p15:sldGuideLst xmlns:p15="http://schemas.microsoft.com/office/powerpoint/2012/main"/>
+    </p:ext>
+  </p:extLst>
 </p:presentation>
 </file>
 
@@ -135,234 +140,10 @@
           <a:chExt cx="0" cy="0"/>
         </a:xfrm>
       </p:grpSpPr>
-      <p:sp>
-        <p:nvSpPr>
-          <p:cNvPr id="2" name="Header Placeholder 1"/>
-          <p:cNvSpPr>
-            <a:spLocks noGrp="1"/>
-          </p:cNvSpPr>
-          <p:nvPr>
-            <p:ph type="hdr" sz="quarter"/>
-          </p:nvPr>
-        </p:nvSpPr>
-        <p:spPr>
-          <a:xfrm>
-            <a:off x="0" y="0"/>
-            <a:ext cx="2971800" cy="458788"/>
-          </a:xfrm>
-          <a:prstGeom prst="rect">
-            <a:avLst/>
-          </a:prstGeom>
-        </p:spPr>
-        <p:txBody>
-          <a:bodyPr vert="horz" lIns="91440" tIns="45720" rIns="91440" bIns="45720" rtlCol="0"/>
-          <a:lstStyle>
-            <a:lvl1pPr algn="l">
-              <a:defRPr sz="1200"/>
-            </a:lvl1pPr>
-          </a:lstStyle>
-          <a:p>
-            <a:endParaRPr lang="en-US"/>
-          </a:p>
-        </p:txBody>
-      </p:sp>
-      <p:sp>
-        <p:nvSpPr>
-          <p:cNvPr id="3" name="Date Placeholder 2"/>
-          <p:cNvSpPr>
-            <a:spLocks noGrp="1"/>
-          </p:cNvSpPr>
-          <p:nvPr>
-            <p:ph type="dt" idx="1"/>
-          </p:nvPr>
-        </p:nvSpPr>
-        <p:spPr>
-          <a:xfrm>
-            <a:off x="3884613" y="0"/>
-            <a:ext cx="2971800" cy="458788"/>
-          </a:xfrm>
-          <a:prstGeom prst="rect">
-            <a:avLst/>
-          </a:prstGeom>
-        </p:spPr>
-        <p:txBody>
-          <a:bodyPr vert="horz" lIns="91440" tIns="45720" rIns="91440" bIns="45720" rtlCol="0"/>
-          <a:lstStyle>
-            <a:lvl1pPr algn="r">
-              <a:defRPr sz="1200"/>
-            </a:lvl1pPr>
-          </a:lstStyle>
-          <a:p>
-            <a:fld id="{5282F153-3F37-0F45-9E97-73ACFA13230C}" type="datetimeFigureOut">
-              <a:rPr lang="en-US"/>
-              <a:t>7/23/19</a:t>
-            </a:fld>
-            <a:endParaRPr lang="en-US"/>
-          </a:p>
-        </p:txBody>
-      </p:sp>
-      <p:sp>
-        <p:nvSpPr>
-          <p:cNvPr id="4" name="Slide Image Placeholder 3"/>
-          <p:cNvSpPr>
-            <a:spLocks noGrp="1" noRot="1" noChangeAspect="1"/>
-          </p:cNvSpPr>
-          <p:nvPr>
-            <p:ph type="sldImg" idx="2"/>
-          </p:nvPr>
-        </p:nvSpPr>
-        <p:spPr>
-          <a:xfrm>
-            <a:off x="685800" y="1143000"/>
-            <a:ext cx="5486400" cy="3086100"/>
-          </a:xfrm>
-          <a:prstGeom prst="rect">
-            <a:avLst/>
-          </a:prstGeom>
-          <a:noFill/>
-          <a:ln w="12700">
-            <a:solidFill>
-              <a:prstClr val="black"/>
-            </a:solidFill>
-          </a:ln>
-        </p:spPr>
-        <p:txBody>
-          <a:bodyPr vert="horz" lIns="91440" tIns="45720" rIns="91440" bIns="45720" rtlCol="0" anchor="ctr"/>
-          <a:lstStyle/>
-          <a:p>
-            <a:endParaRPr lang="en-US"/>
-          </a:p>
-        </p:txBody>
-      </p:sp>
-      <p:sp>
-        <p:nvSpPr>
-          <p:cNvPr id="5" name="Notes Placeholder 4"/>
-          <p:cNvSpPr>
-            <a:spLocks noGrp="1"/>
-          </p:cNvSpPr>
-          <p:nvPr>
-            <p:ph type="body" sz="quarter" idx="3"/>
-          </p:nvPr>
-        </p:nvSpPr>
-        <p:spPr>
-          <a:xfrm>
-            <a:off x="685800" y="4400550"/>
-            <a:ext cx="5486400" cy="3600450"/>
-          </a:xfrm>
-          <a:prstGeom prst="rect">
-            <a:avLst/>
-          </a:prstGeom>
-        </p:spPr>
-        <p:txBody>
-          <a:bodyPr vert="horz" lIns="91440" tIns="45720" rIns="91440" bIns="45720" rtlCol="0"/>
-          <a:lstStyle/>
-          <a:p>
-            <a:pPr lvl="0"/>
-            <a:r>
-              <a:rPr lang="en-US"/>
-              <a:t>Click to edit Master text styles</a:t>
-            </a:r>
-          </a:p>
-          <a:p>
-            <a:pPr lvl="1"/>
-            <a:r>
-              <a:rPr lang="en-US"/>
-              <a:t>Second level</a:t>
-            </a:r>
-          </a:p>
-          <a:p>
-            <a:pPr lvl="2"/>
-            <a:r>
-              <a:rPr lang="en-US"/>
-              <a:t>Third level</a:t>
-            </a:r>
-          </a:p>
-          <a:p>
-            <a:pPr lvl="3"/>
-            <a:r>
-              <a:rPr lang="en-US"/>
-              <a:t>Fourth level</a:t>
-            </a:r>
-          </a:p>
-          <a:p>
-            <a:pPr lvl="4"/>
-            <a:r>
-              <a:rPr lang="en-US"/>
-              <a:t>Fifth level</a:t>
-            </a:r>
-          </a:p>
-        </p:txBody>
-      </p:sp>
-      <p:sp>
-        <p:nvSpPr>
-          <p:cNvPr id="6" name="Footer Placeholder 5"/>
-          <p:cNvSpPr>
-            <a:spLocks noGrp="1"/>
-          </p:cNvSpPr>
-          <p:nvPr>
-            <p:ph type="ftr" sz="quarter" idx="4"/>
-          </p:nvPr>
-        </p:nvSpPr>
-        <p:spPr>
-          <a:xfrm>
-            <a:off x="0" y="8685213"/>
-            <a:ext cx="2971800" cy="458787"/>
-          </a:xfrm>
-          <a:prstGeom prst="rect">
-            <a:avLst/>
-          </a:prstGeom>
-        </p:spPr>
-        <p:txBody>
-          <a:bodyPr vert="horz" lIns="91440" tIns="45720" rIns="91440" bIns="45720" rtlCol="0" anchor="b"/>
-          <a:lstStyle>
-            <a:lvl1pPr algn="l">
-              <a:defRPr sz="1200"/>
-            </a:lvl1pPr>
-          </a:lstStyle>
-          <a:p>
-            <a:endParaRPr lang="en-US"/>
-          </a:p>
-        </p:txBody>
-      </p:sp>
-      <p:sp>
-        <p:nvSpPr>
-          <p:cNvPr id="7" name="Slide Number Placeholder 6"/>
-          <p:cNvSpPr>
-            <a:spLocks noGrp="1"/>
-          </p:cNvSpPr>
-          <p:nvPr>
-            <p:ph type="sldNum" sz="quarter" idx="5"/>
-          </p:nvPr>
-        </p:nvSpPr>
-        <p:spPr>
-          <a:xfrm>
-            <a:off x="3884613" y="8685213"/>
-            <a:ext cx="2971800" cy="458787"/>
-          </a:xfrm>
-          <a:prstGeom prst="rect">
-            <a:avLst/>
-          </a:prstGeom>
-        </p:spPr>
-        <p:txBody>
-          <a:bodyPr vert="horz" lIns="91440" tIns="45720" rIns="91440" bIns="45720" rtlCol="0" anchor="b"/>
-          <a:lstStyle>
-            <a:lvl1pPr algn="r">
-              <a:defRPr sz="1200"/>
-            </a:lvl1pPr>
-          </a:lstStyle>
-          <a:p>
-            <a:fld id="{CE5E9CC1-C706-0F49-92D6-E571CC5EEA8F}" type="slidenum">
-              <a:rPr lang="en-US"/>
-              <a:t>‹#›</a:t>
-            </a:fld>
-            <a:endParaRPr lang="en-US"/>
-          </a:p>
-        </p:txBody>
-      </p:sp>
     </p:spTree>
     <p:extLst>
       <p:ext uri="{BB962C8B-B14F-4D97-AF65-F5344CB8AC3E}">
-        <p14:creationId xmlns:p14="http://schemas.microsoft.com/office/powerpoint/2010/main" val="1024086991"/>
+        <p14:creationId xmlns:p14="http://schemas.microsoft.com/office/powerpoint/2010/main" val="1871612596"/>
       </p:ext>
     </p:extLst>
   </p:cSld>
@@ -506,10 +287,6 @@
           <a:bodyPr/>
           <a:lstStyle/>
           <a:p>
-            <a:r>
-              <a:rPr lang="en-US" dirty="0"/>
-              <a:t/>
-            </a:r>
             <a:endParaRPr lang="en-US" dirty="0"/>
           </a:p>
         </p:txBody>
@@ -594,10 +371,6 @@
           <a:bodyPr/>
           <a:lstStyle/>
           <a:p>
-            <a:r>
-              <a:rPr lang="en-US" dirty="0"/>
-              <a:t/>
-            </a:r>
             <a:endParaRPr lang="en-US" dirty="0"/>
           </a:p>
         </p:txBody>
@@ -682,10 +455,6 @@
           <a:bodyPr/>
           <a:lstStyle/>
           <a:p>
-            <a:r>
-              <a:rPr lang="en-US" dirty="0"/>
-              <a:t/>
-            </a:r>
             <a:endParaRPr lang="en-US" dirty="0"/>
           </a:p>
         </p:txBody>
@@ -770,10 +539,6 @@
           <a:bodyPr/>
           <a:lstStyle/>
           <a:p>
-            <a:r>
-              <a:rPr lang="en-US" dirty="0"/>
-              <a:t/>
-            </a:r>
             <a:endParaRPr lang="en-US" dirty="0"/>
           </a:p>
         </p:txBody>
@@ -858,10 +623,6 @@
           <a:bodyPr/>
           <a:lstStyle/>
           <a:p>
-            <a:r>
-              <a:rPr lang="en-US" dirty="0"/>
-              <a:t/>
-            </a:r>
             <a:endParaRPr lang="en-US" dirty="0"/>
           </a:p>
         </p:txBody>
@@ -946,10 +707,6 @@
           <a:bodyPr/>
           <a:lstStyle/>
           <a:p>
-            <a:r>
-              <a:rPr lang="en-US" dirty="0"/>
-              <a:t/>
-            </a:r>
             <a:endParaRPr lang="en-US" dirty="0"/>
           </a:p>
         </p:txBody>
@@ -1034,10 +791,6 @@
           <a:bodyPr/>
           <a:lstStyle/>
           <a:p>
-            <a:r>
-              <a:rPr lang="en-US" dirty="0"/>
-              <a:t/>
-            </a:r>
             <a:endParaRPr lang="en-US" dirty="0"/>
           </a:p>
         </p:txBody>
@@ -1111,6 +864,11 @@
 <file path=ppt/slideMasters/slideMaster1.xml><?xml version="1.0" encoding="utf-8"?>
 <p:sldMaster xmlns:a="http://schemas.openxmlformats.org/drawingml/2006/main" xmlns:r="http://schemas.openxmlformats.org/officeDocument/2006/relationships" xmlns:p="http://schemas.openxmlformats.org/presentationml/2006/main">
   <p:cSld>
+    <p:bg>
+      <p:bgRef idx="1001">
+        <a:schemeClr val="bg1"/>
+      </p:bgRef>
+    </p:bg>
     <p:spTree>
       <p:nvGrpSpPr>
         <p:cNvPr id="1" name=""/>
@@ -1393,6 +1151,7 @@
         <a:solidFill>
           <a:srgbClr val="FFFFFF"/>
         </a:solidFill>
+        <a:effectLst/>
       </p:bgPr>
     </p:bg>
     <p:spTree>
@@ -1470,7 +1229,7 @@
             <a:off x="5669280" y="274320"/>
             <a:ext cx="3840480" cy="3840480"/>
           </a:xfrm>
-          <a:prstGeom prst="oval">
+          <a:prstGeom prst="line">
             <a:avLst/>
           </a:prstGeom>
           <a:solidFill>
@@ -1509,7 +1268,7 @@
           <a:bodyPr wrap="square" lIns="0" tIns="0" rIns="0" bIns="0" rtlCol="0" anchor="ctr"/>
           <a:lstStyle/>
           <a:p>
-            <a:pPr algn="ctr" indent="0" marL="0">
+            <a:pPr marL="0" indent="0" algn="ctr">
               <a:buNone/>
             </a:pPr>
             <a:r>
@@ -1575,11 +1334,11 @@
           <a:bodyPr wrap="square" lIns="0" tIns="0" rIns="0" bIns="0" rtlCol="0" anchor="ctr"/>
           <a:lstStyle/>
           <a:p>
-            <a:pPr indent="0" marL="0">
-              <a:buNone/>
-            </a:pPr>
-            <a:r>
-              <a:rPr lang="en-US" sz="750" b="1" spc="100" kern="0" dirty="0">
+            <a:pPr marL="0" indent="0">
+              <a:buNone/>
+            </a:pPr>
+            <a:r>
+              <a:rPr lang="en-US" sz="750" b="1" kern="0" spc="100" dirty="0">
                 <a:solidFill>
                   <a:srgbClr val="117A65"/>
                 </a:solidFill>
@@ -1614,7 +1373,7 @@
           <a:bodyPr wrap="square" lIns="0" tIns="0" rIns="0" bIns="0" rtlCol="0" anchor="ctr"/>
           <a:lstStyle/>
           <a:p>
-            <a:pPr indent="0" marL="0">
+            <a:pPr marL="0" indent="0">
               <a:lnSpc>
                 <a:spcPct val="108000"/>
               </a:lnSpc>
@@ -1634,7 +1393,7 @@
             <a:endParaRPr lang="en-US" sz="2700" dirty="0"/>
           </a:p>
           <a:p>
-            <a:pPr indent="0" marL="0">
+            <a:pPr marL="0" indent="0">
               <a:lnSpc>
                 <a:spcPct val="108000"/>
               </a:lnSpc>
@@ -1676,7 +1435,7 @@
           <a:bodyPr wrap="square" lIns="0" tIns="0" rIns="0" bIns="0" rtlCol="0" anchor="ctr"/>
           <a:lstStyle/>
           <a:p>
-            <a:pPr indent="0" marL="0">
+            <a:pPr marL="0" indent="0">
               <a:buNone/>
             </a:pPr>
             <a:r>
@@ -1738,7 +1497,7 @@
           <a:bodyPr wrap="square" lIns="0" tIns="0" rIns="0" bIns="0" rtlCol="0" anchor="ctr"/>
           <a:lstStyle/>
           <a:p>
-            <a:pPr indent="0" marL="0">
+            <a:pPr marL="0" indent="0">
               <a:buNone/>
             </a:pPr>
             <a:r>
@@ -1777,7 +1536,7 @@
           <a:bodyPr wrap="square" lIns="0" tIns="0" rIns="0" bIns="0" rtlCol="0" anchor="ctr"/>
           <a:lstStyle/>
           <a:p>
-            <a:pPr indent="0" marL="0">
+            <a:pPr marL="0" indent="0">
               <a:buNone/>
             </a:pPr>
             <a:r>
@@ -1816,7 +1575,7 @@
           <a:bodyPr wrap="square" lIns="0" tIns="0" rIns="0" bIns="0" rtlCol="0" anchor="ctr"/>
           <a:lstStyle/>
           <a:p>
-            <a:pPr indent="0" marL="0">
+            <a:pPr marL="0" indent="0">
               <a:buNone/>
             </a:pPr>
             <a:r>
@@ -1850,6 +1609,7 @@
         <a:solidFill>
           <a:srgbClr val="FFFFFF"/>
         </a:solidFill>
+        <a:effectLst/>
       </p:bgPr>
     </p:bg>
     <p:spTree>
@@ -1937,7 +1697,7 @@
           <a:bodyPr wrap="square" lIns="0" tIns="0" rIns="0" bIns="0" rtlCol="0" anchor="ctr"/>
           <a:lstStyle/>
           <a:p>
-            <a:pPr indent="0" marL="0">
+            <a:pPr marL="0" indent="0">
               <a:buNone/>
             </a:pPr>
             <a:r>
@@ -1979,7 +1739,7 @@
             <a:prstDash val="solid"/>
           </a:ln>
           <a:effectLst>
-            <a:outerShdw sx="100000" sy="100000" kx="0" ky="0" algn="bl" rotWithShape="0" blurRad="101600" dist="38100" dir="8100000">
+            <a:outerShdw blurRad="101600" dist="38100" dir="8100000" algn="bl" rotWithShape="0">
               <a:srgbClr val="7DAA8C">
                 <a:alpha val="13000"/>
               </a:srgbClr>
@@ -2033,7 +1793,7 @@
           <a:bodyPr wrap="square" lIns="0" tIns="0" rIns="0" bIns="0" rtlCol="0" anchor="ctr"/>
           <a:lstStyle/>
           <a:p>
-            <a:pPr indent="0" marL="0">
+            <a:pPr marL="0" indent="0">
               <a:buNone/>
             </a:pPr>
             <a:r>
@@ -2072,7 +1832,7 @@
           <a:bodyPr wrap="square" lIns="0" tIns="0" rIns="0" bIns="0" rtlCol="0" anchor="ctr"/>
           <a:lstStyle/>
           <a:p>
-            <a:pPr indent="0" marL="0">
+            <a:pPr marL="0" indent="0">
               <a:buNone/>
             </a:pPr>
             <a:r>
@@ -2111,7 +1871,7 @@
           <a:bodyPr wrap="square" lIns="0" tIns="0" rIns="0" bIns="0" rtlCol="0" anchor="ctr"/>
           <a:lstStyle/>
           <a:p>
-            <a:pPr indent="0" marL="0">
+            <a:pPr marL="0" indent="0">
               <a:buNone/>
             </a:pPr>
             <a:r>
@@ -2153,7 +1913,7 @@
             <a:prstDash val="solid"/>
           </a:ln>
           <a:effectLst>
-            <a:outerShdw sx="100000" sy="100000" kx="0" ky="0" algn="bl" rotWithShape="0" blurRad="101600" dist="38100" dir="8100000">
+            <a:outerShdw blurRad="101600" dist="38100" dir="8100000" algn="bl" rotWithShape="0">
               <a:srgbClr val="7DAA8C">
                 <a:alpha val="13000"/>
               </a:srgbClr>
@@ -2207,7 +1967,7 @@
           <a:bodyPr wrap="square" lIns="0" tIns="0" rIns="0" bIns="0" rtlCol="0" anchor="ctr"/>
           <a:lstStyle/>
           <a:p>
-            <a:pPr indent="0" marL="0">
+            <a:pPr marL="0" indent="0">
               <a:buNone/>
             </a:pPr>
             <a:r>
@@ -2246,7 +2006,7 @@
           <a:bodyPr wrap="square" lIns="0" tIns="0" rIns="0" bIns="0" rtlCol="0" anchor="ctr"/>
           <a:lstStyle/>
           <a:p>
-            <a:pPr indent="0" marL="0">
+            <a:pPr marL="0" indent="0">
               <a:buNone/>
             </a:pPr>
             <a:r>
@@ -2285,7 +2045,7 @@
           <a:bodyPr wrap="square" lIns="0" tIns="0" rIns="0" bIns="0" rtlCol="0" anchor="ctr"/>
           <a:lstStyle/>
           <a:p>
-            <a:pPr indent="0" marL="0">
+            <a:pPr marL="0" indent="0">
               <a:buNone/>
             </a:pPr>
             <a:r>
@@ -2327,7 +2087,7 @@
             <a:prstDash val="solid"/>
           </a:ln>
           <a:effectLst>
-            <a:outerShdw sx="100000" sy="100000" kx="0" ky="0" algn="bl" rotWithShape="0" blurRad="101600" dist="38100" dir="8100000">
+            <a:outerShdw blurRad="101600" dist="38100" dir="8100000" algn="bl" rotWithShape="0">
               <a:srgbClr val="7DAA8C">
                 <a:alpha val="13000"/>
               </a:srgbClr>
@@ -2381,7 +2141,7 @@
           <a:bodyPr wrap="square" lIns="0" tIns="0" rIns="0" bIns="0" rtlCol="0" anchor="ctr"/>
           <a:lstStyle/>
           <a:p>
-            <a:pPr indent="0" marL="0">
+            <a:pPr marL="0" indent="0">
               <a:buNone/>
             </a:pPr>
             <a:r>
@@ -2420,7 +2180,7 @@
           <a:bodyPr wrap="square" lIns="0" tIns="0" rIns="0" bIns="0" rtlCol="0" anchor="ctr"/>
           <a:lstStyle/>
           <a:p>
-            <a:pPr indent="0" marL="0">
+            <a:pPr marL="0" indent="0">
               <a:buNone/>
             </a:pPr>
             <a:r>
@@ -2459,7 +2219,7 @@
           <a:bodyPr wrap="square" lIns="0" tIns="0" rIns="0" bIns="0" rtlCol="0" anchor="ctr"/>
           <a:lstStyle/>
           <a:p>
-            <a:pPr indent="0" marL="0">
+            <a:pPr marL="0" indent="0">
               <a:buNone/>
             </a:pPr>
             <a:r>
@@ -2501,7 +2261,7 @@
             <a:prstDash val="solid"/>
           </a:ln>
           <a:effectLst>
-            <a:outerShdw sx="100000" sy="100000" kx="0" ky="0" algn="bl" rotWithShape="0" blurRad="101600" dist="38100" dir="8100000">
+            <a:outerShdw blurRad="101600" dist="38100" dir="8100000" algn="bl" rotWithShape="0">
               <a:srgbClr val="7DAA8C">
                 <a:alpha val="13000"/>
               </a:srgbClr>
@@ -2555,7 +2315,7 @@
           <a:bodyPr wrap="square" lIns="0" tIns="0" rIns="0" bIns="0" rtlCol="0" anchor="ctr"/>
           <a:lstStyle/>
           <a:p>
-            <a:pPr indent="0" marL="0">
+            <a:pPr marL="0" indent="0">
               <a:buNone/>
             </a:pPr>
             <a:r>
@@ -2594,7 +2354,7 @@
           <a:bodyPr wrap="square" lIns="0" tIns="0" rIns="0" bIns="0" rtlCol="0" anchor="ctr"/>
           <a:lstStyle/>
           <a:p>
-            <a:pPr indent="0" marL="0">
+            <a:pPr marL="0" indent="0">
               <a:buNone/>
             </a:pPr>
             <a:r>
@@ -2633,7 +2393,7 @@
           <a:bodyPr wrap="square" lIns="0" tIns="0" rIns="0" bIns="0" rtlCol="0" anchor="ctr"/>
           <a:lstStyle/>
           <a:p>
-            <a:pPr indent="0" marL="0">
+            <a:pPr marL="0" indent="0">
               <a:buNone/>
             </a:pPr>
             <a:r>
@@ -2672,7 +2432,7 @@
           <a:bodyPr wrap="square" lIns="0" tIns="0" rIns="0" bIns="0" rtlCol="0" anchor="ctr"/>
           <a:lstStyle/>
           <a:p>
-            <a:pPr indent="0" marL="0">
+            <a:pPr marL="0" indent="0">
               <a:buNone/>
             </a:pPr>
             <a:r>
@@ -2736,7 +2496,7 @@
           <a:bodyPr wrap="square" lIns="0" tIns="0" rIns="0" bIns="0" rtlCol="0" anchor="ctr"/>
           <a:lstStyle/>
           <a:p>
-            <a:pPr indent="0" marL="0">
+            <a:pPr marL="0" indent="0">
               <a:lnSpc>
                 <a:spcPct val="110000"/>
               </a:lnSpc>
@@ -2756,7 +2516,7 @@
             <a:endParaRPr lang="en-US" sz="1200" dirty="0"/>
           </a:p>
           <a:p>
-            <a:pPr indent="0" marL="0">
+            <a:pPr marL="0" indent="0">
               <a:lnSpc>
                 <a:spcPct val="110000"/>
               </a:lnSpc>
@@ -2776,7 +2536,7 @@
             <a:endParaRPr lang="en-US" sz="1200" dirty="0"/>
           </a:p>
           <a:p>
-            <a:pPr indent="0" marL="0">
+            <a:pPr marL="0" indent="0">
               <a:lnSpc>
                 <a:spcPct val="110000"/>
               </a:lnSpc>
@@ -2843,7 +2603,7 @@
           <a:bodyPr wrap="square" lIns="0" tIns="0" rIns="0" bIns="0" rtlCol="0" anchor="ctr"/>
           <a:lstStyle/>
           <a:p>
-            <a:pPr indent="0" marL="0">
+            <a:pPr marL="0" indent="0">
               <a:buNone/>
             </a:pPr>
             <a:r>
@@ -2877,6 +2637,7 @@
         <a:solidFill>
           <a:srgbClr val="F4FBF7"/>
         </a:solidFill>
+        <a:effectLst/>
       </p:bgPr>
     </p:bg>
     <p:spTree>
@@ -2939,7 +2700,7 @@
           <a:bodyPr wrap="square" lIns="0" tIns="0" rIns="0" bIns="0" rtlCol="0" anchor="ctr"/>
           <a:lstStyle/>
           <a:p>
-            <a:pPr indent="0" marL="0">
+            <a:pPr marL="0" indent="0">
               <a:buNone/>
             </a:pPr>
             <a:r>
@@ -2978,7 +2739,7 @@
           <a:bodyPr wrap="square" lIns="0" tIns="0" rIns="0" bIns="0" rtlCol="0" anchor="ctr"/>
           <a:lstStyle/>
           <a:p>
-            <a:pPr indent="0" marL="0">
+            <a:pPr marL="0" indent="0">
               <a:buNone/>
             </a:pPr>
             <a:r>
@@ -3017,7 +2778,7 @@
           <a:bodyPr wrap="square" lIns="0" tIns="0" rIns="0" bIns="0" rtlCol="0" anchor="ctr"/>
           <a:lstStyle/>
           <a:p>
-            <a:pPr indent="0" marL="0">
+            <a:pPr marL="0" indent="0">
               <a:buNone/>
             </a:pPr>
             <a:r>
@@ -3059,7 +2820,7 @@
             <a:prstDash val="solid"/>
           </a:ln>
           <a:effectLst>
-            <a:outerShdw sx="100000" sy="100000" kx="0" ky="0" algn="bl" rotWithShape="0" blurRad="101600" dist="38100" dir="8100000">
+            <a:outerShdw blurRad="101600" dist="38100" dir="8100000" algn="bl" rotWithShape="0">
               <a:srgbClr val="7DAA8C">
                 <a:alpha val="13000"/>
               </a:srgbClr>
@@ -3113,7 +2874,7 @@
           <a:bodyPr wrap="square" lIns="0" tIns="0" rIns="0" bIns="0" rtlCol="0" anchor="ctr"/>
           <a:lstStyle/>
           <a:p>
-            <a:pPr indent="0" marL="0">
+            <a:pPr marL="0" indent="0">
               <a:buNone/>
             </a:pPr>
             <a:r>
@@ -3202,7 +2963,7 @@
           <a:bodyPr wrap="square" lIns="0" tIns="0" rIns="0" bIns="0" rtlCol="0" anchor="ctr"/>
           <a:lstStyle/>
           <a:p>
-            <a:pPr indent="0" marL="0">
+            <a:pPr marL="0" indent="0">
               <a:buNone/>
             </a:pPr>
             <a:r>
@@ -3241,7 +3002,7 @@
           <a:bodyPr wrap="square" lIns="0" tIns="0" rIns="0" bIns="0" rtlCol="0" anchor="ctr"/>
           <a:lstStyle/>
           <a:p>
-            <a:pPr indent="0" marL="0">
+            <a:pPr marL="0" indent="0">
               <a:buNone/>
             </a:pPr>
             <a:r>
@@ -3330,7 +3091,7 @@
           <a:bodyPr wrap="square" lIns="0" tIns="0" rIns="0" bIns="0" rtlCol="0" anchor="ctr"/>
           <a:lstStyle/>
           <a:p>
-            <a:pPr indent="0" marL="0">
+            <a:pPr marL="0" indent="0">
               <a:buNone/>
             </a:pPr>
             <a:r>
@@ -3369,7 +3130,7 @@
           <a:bodyPr wrap="square" lIns="0" tIns="0" rIns="0" bIns="0" rtlCol="0" anchor="ctr"/>
           <a:lstStyle/>
           <a:p>
-            <a:pPr indent="0" marL="0">
+            <a:pPr marL="0" indent="0">
               <a:buNone/>
             </a:pPr>
             <a:r>
@@ -3458,7 +3219,7 @@
           <a:bodyPr wrap="square" lIns="0" tIns="0" rIns="0" bIns="0" rtlCol="0" anchor="ctr"/>
           <a:lstStyle/>
           <a:p>
-            <a:pPr indent="0" marL="0">
+            <a:pPr marL="0" indent="0">
               <a:buNone/>
             </a:pPr>
             <a:r>
@@ -3497,7 +3258,7 @@
           <a:bodyPr wrap="square" lIns="0" tIns="0" rIns="0" bIns="0" rtlCol="0" anchor="ctr"/>
           <a:lstStyle/>
           <a:p>
-            <a:pPr indent="0" marL="0">
+            <a:pPr marL="0" indent="0">
               <a:buNone/>
             </a:pPr>
             <a:r>
@@ -3586,7 +3347,7 @@
           <a:bodyPr wrap="square" lIns="0" tIns="0" rIns="0" bIns="0" rtlCol="0" anchor="ctr"/>
           <a:lstStyle/>
           <a:p>
-            <a:pPr indent="0" marL="0">
+            <a:pPr marL="0" indent="0">
               <a:buNone/>
             </a:pPr>
             <a:r>
@@ -3625,7 +3386,7 @@
           <a:bodyPr wrap="square" lIns="0" tIns="0" rIns="0" bIns="0" rtlCol="0" anchor="ctr"/>
           <a:lstStyle/>
           <a:p>
-            <a:pPr indent="0" marL="0">
+            <a:pPr marL="0" indent="0">
               <a:buNone/>
             </a:pPr>
             <a:r>
@@ -3714,7 +3475,7 @@
           <a:bodyPr wrap="square" lIns="0" tIns="0" rIns="0" bIns="0" rtlCol="0" anchor="ctr"/>
           <a:lstStyle/>
           <a:p>
-            <a:pPr indent="0" marL="0">
+            <a:pPr marL="0" indent="0">
               <a:buNone/>
             </a:pPr>
             <a:r>
@@ -3753,7 +3514,7 @@
           <a:bodyPr wrap="square" lIns="0" tIns="0" rIns="0" bIns="0" rtlCol="0" anchor="ctr"/>
           <a:lstStyle/>
           <a:p>
-            <a:pPr indent="0" marL="0">
+            <a:pPr marL="0" indent="0">
               <a:buNone/>
             </a:pPr>
             <a:r>
@@ -3817,7 +3578,7 @@
           <a:bodyPr wrap="square" lIns="0" tIns="0" rIns="0" bIns="0" rtlCol="0" anchor="ctr"/>
           <a:lstStyle/>
           <a:p>
-            <a:pPr indent="0" marL="0">
+            <a:pPr marL="0" indent="0">
               <a:lnSpc>
                 <a:spcPct val="120000"/>
               </a:lnSpc>
@@ -3837,7 +3598,7 @@
             <a:endParaRPr lang="en-US" sz="900" dirty="0"/>
           </a:p>
           <a:p>
-            <a:pPr indent="0" marL="0">
+            <a:pPr marL="0" indent="0">
               <a:lnSpc>
                 <a:spcPct val="120000"/>
               </a:lnSpc>
@@ -3857,7 +3618,7 @@
             <a:endParaRPr lang="en-US" sz="900" dirty="0"/>
           </a:p>
           <a:p>
-            <a:pPr indent="0" marL="0">
+            <a:pPr marL="0" indent="0">
               <a:lnSpc>
                 <a:spcPct val="120000"/>
               </a:lnSpc>
@@ -3902,7 +3663,7 @@
             <a:prstDash val="solid"/>
           </a:ln>
           <a:effectLst>
-            <a:outerShdw sx="100000" sy="100000" kx="0" ky="0" algn="bl" rotWithShape="0" blurRad="101600" dist="38100" dir="8100000">
+            <a:outerShdw blurRad="101600" dist="38100" dir="8100000" algn="bl" rotWithShape="0">
               <a:srgbClr val="7DAA8C">
                 <a:alpha val="13000"/>
               </a:srgbClr>
@@ -3956,7 +3717,7 @@
           <a:bodyPr wrap="square" lIns="0" tIns="0" rIns="0" bIns="0" rtlCol="0" anchor="ctr"/>
           <a:lstStyle/>
           <a:p>
-            <a:pPr indent="0" marL="0">
+            <a:pPr marL="0" indent="0">
               <a:buNone/>
             </a:pPr>
             <a:r>
@@ -3995,7 +3756,7 @@
           <a:bodyPr wrap="square" lIns="0" tIns="0" rIns="0" bIns="0" rtlCol="0" anchor="ctr"/>
           <a:lstStyle/>
           <a:p>
-            <a:pPr indent="0" marL="0">
+            <a:pPr marL="0" indent="0">
               <a:lnSpc>
                 <a:spcPct val="130000"/>
               </a:lnSpc>
@@ -4062,7 +3823,7 @@
           <a:bodyPr wrap="square" lIns="0" tIns="0" rIns="0" bIns="0" rtlCol="0" anchor="ctr"/>
           <a:lstStyle/>
           <a:p>
-            <a:pPr indent="0" marL="0">
+            <a:pPr marL="0" indent="0">
               <a:buNone/>
             </a:pPr>
             <a:r>
@@ -4101,7 +3862,7 @@
           <a:bodyPr wrap="square" lIns="0" tIns="0" rIns="0" bIns="0" rtlCol="0" anchor="ctr"/>
           <a:lstStyle/>
           <a:p>
-            <a:pPr indent="0" marL="0">
+            <a:pPr marL="0" indent="0">
               <a:buNone/>
             </a:pPr>
             <a:r>
@@ -4165,7 +3926,7 @@
           <a:bodyPr wrap="square" lIns="0" tIns="0" rIns="0" bIns="0" rtlCol="0" anchor="ctr"/>
           <a:lstStyle/>
           <a:p>
-            <a:pPr indent="0" marL="0">
+            <a:pPr marL="0" indent="0">
               <a:buNone/>
             </a:pPr>
             <a:r>
@@ -4204,7 +3965,7 @@
           <a:bodyPr wrap="square" lIns="0" tIns="0" rIns="0" bIns="0" rtlCol="0" anchor="ctr"/>
           <a:lstStyle/>
           <a:p>
-            <a:pPr indent="0" marL="0">
+            <a:pPr marL="0" indent="0">
               <a:buNone/>
             </a:pPr>
             <a:r>
@@ -4268,7 +4029,7 @@
           <a:bodyPr wrap="square" lIns="0" tIns="0" rIns="0" bIns="0" rtlCol="0" anchor="ctr"/>
           <a:lstStyle/>
           <a:p>
-            <a:pPr indent="0" marL="0">
+            <a:pPr marL="0" indent="0">
               <a:buNone/>
             </a:pPr>
             <a:r>
@@ -4307,7 +4068,7 @@
           <a:bodyPr wrap="square" lIns="0" tIns="0" rIns="0" bIns="0" rtlCol="0" anchor="ctr"/>
           <a:lstStyle/>
           <a:p>
-            <a:pPr indent="0" marL="0">
+            <a:pPr marL="0" indent="0">
               <a:buNone/>
             </a:pPr>
             <a:r>
@@ -4371,7 +4132,7 @@
           <a:bodyPr wrap="square" lIns="0" tIns="0" rIns="0" bIns="0" rtlCol="0" anchor="ctr"/>
           <a:lstStyle/>
           <a:p>
-            <a:pPr indent="0" marL="0">
+            <a:pPr marL="0" indent="0">
               <a:buNone/>
             </a:pPr>
             <a:r>
@@ -4410,7 +4171,7 @@
           <a:bodyPr wrap="square" lIns="0" tIns="0" rIns="0" bIns="0" rtlCol="0" anchor="ctr"/>
           <a:lstStyle/>
           <a:p>
-            <a:pPr indent="0" marL="0">
+            <a:pPr marL="0" indent="0">
               <a:buNone/>
             </a:pPr>
             <a:r>
@@ -4474,7 +4235,7 @@
           <a:bodyPr wrap="square" lIns="0" tIns="0" rIns="0" bIns="0" rtlCol="0" anchor="ctr"/>
           <a:lstStyle/>
           <a:p>
-            <a:pPr indent="0" marL="0">
+            <a:pPr marL="0" indent="0">
               <a:buNone/>
             </a:pPr>
             <a:r>
@@ -4508,6 +4269,7 @@
         <a:solidFill>
           <a:srgbClr val="FFFFFF"/>
         </a:solidFill>
+        <a:effectLst/>
       </p:bgPr>
     </p:bg>
     <p:spTree>
@@ -4595,7 +4357,7 @@
           <a:bodyPr wrap="square" lIns="0" tIns="0" rIns="0" bIns="0" rtlCol="0" anchor="ctr"/>
           <a:lstStyle/>
           <a:p>
-            <a:pPr indent="0" marL="0">
+            <a:pPr marL="0" indent="0">
               <a:buNone/>
             </a:pPr>
             <a:r>
@@ -4634,7 +4396,7 @@
           <a:bodyPr wrap="square" lIns="0" tIns="0" rIns="0" bIns="0" rtlCol="0" anchor="ctr"/>
           <a:lstStyle/>
           <a:p>
-            <a:pPr indent="0" marL="0">
+            <a:pPr marL="0" indent="0">
               <a:buNone/>
             </a:pPr>
             <a:r>
@@ -4673,7 +4435,7 @@
           <a:bodyPr wrap="square" lIns="0" tIns="0" rIns="0" bIns="0" rtlCol="0" anchor="ctr"/>
           <a:lstStyle/>
           <a:p>
-            <a:pPr indent="0" marL="0">
+            <a:pPr marL="0" indent="0">
               <a:buNone/>
             </a:pPr>
             <a:r>
@@ -4737,7 +4499,7 @@
           <a:bodyPr wrap="square" lIns="0" tIns="0" rIns="0" bIns="0" rtlCol="0" anchor="ctr"/>
           <a:lstStyle/>
           <a:p>
-            <a:pPr indent="0" marL="0">
+            <a:pPr marL="0" indent="0">
               <a:buNone/>
             </a:pPr>
             <a:r>
@@ -4801,7 +4563,7 @@
           <a:bodyPr wrap="square" lIns="0" tIns="0" rIns="0" bIns="0" rtlCol="0" anchor="ctr"/>
           <a:lstStyle/>
           <a:p>
-            <a:pPr indent="0" marL="0">
+            <a:pPr marL="0" indent="0">
               <a:buNone/>
             </a:pPr>
             <a:r>
@@ -4865,7 +4627,7 @@
           <a:bodyPr wrap="square" lIns="0" tIns="0" rIns="0" bIns="0" rtlCol="0" anchor="ctr"/>
           <a:lstStyle/>
           <a:p>
-            <a:pPr indent="0" marL="0">
+            <a:pPr marL="0" indent="0">
               <a:buNone/>
             </a:pPr>
             <a:r>
@@ -4929,7 +4691,7 @@
           <a:bodyPr wrap="square" lIns="0" tIns="0" rIns="0" bIns="0" rtlCol="0" anchor="ctr"/>
           <a:lstStyle/>
           <a:p>
-            <a:pPr indent="0" marL="0">
+            <a:pPr marL="0" indent="0">
               <a:buNone/>
             </a:pPr>
             <a:r>
@@ -5043,7 +4805,7 @@
           <a:bodyPr wrap="square" lIns="0" tIns="0" rIns="0" bIns="0" rtlCol="0" anchor="ctr"/>
           <a:lstStyle/>
           <a:p>
-            <a:pPr indent="0" marL="0">
+            <a:pPr marL="0" indent="0">
               <a:buNone/>
             </a:pPr>
             <a:r>
@@ -5082,7 +4844,7 @@
           <a:bodyPr wrap="square" lIns="0" tIns="0" rIns="0" bIns="0" rtlCol="0" anchor="ctr"/>
           <a:lstStyle/>
           <a:p>
-            <a:pPr indent="0" marL="0">
+            <a:pPr marL="0" indent="0">
               <a:buNone/>
             </a:pPr>
             <a:r>
@@ -5121,7 +4883,7 @@
           <a:bodyPr wrap="square" lIns="0" tIns="0" rIns="0" bIns="0" rtlCol="0" anchor="ctr"/>
           <a:lstStyle/>
           <a:p>
-            <a:pPr indent="0" marL="0">
+            <a:pPr marL="0" indent="0">
               <a:buNone/>
             </a:pPr>
             <a:r>
@@ -5235,7 +4997,7 @@
           <a:bodyPr wrap="square" lIns="0" tIns="0" rIns="0" bIns="0" rtlCol="0" anchor="ctr"/>
           <a:lstStyle/>
           <a:p>
-            <a:pPr indent="0" marL="0">
+            <a:pPr marL="0" indent="0">
               <a:buNone/>
             </a:pPr>
             <a:r>
@@ -5274,7 +5036,7 @@
           <a:bodyPr wrap="square" lIns="0" tIns="0" rIns="0" bIns="0" rtlCol="0" anchor="ctr"/>
           <a:lstStyle/>
           <a:p>
-            <a:pPr indent="0" marL="0">
+            <a:pPr marL="0" indent="0">
               <a:buNone/>
             </a:pPr>
             <a:r>
@@ -5313,7 +5075,7 @@
           <a:bodyPr wrap="square" lIns="0" tIns="0" rIns="0" bIns="0" rtlCol="0" anchor="ctr"/>
           <a:lstStyle/>
           <a:p>
-            <a:pPr indent="0" marL="0">
+            <a:pPr marL="0" indent="0">
               <a:buNone/>
             </a:pPr>
             <a:r>
@@ -5427,7 +5189,7 @@
           <a:bodyPr wrap="square" lIns="0" tIns="0" rIns="0" bIns="0" rtlCol="0" anchor="ctr"/>
           <a:lstStyle/>
           <a:p>
-            <a:pPr indent="0" marL="0">
+            <a:pPr marL="0" indent="0">
               <a:buNone/>
             </a:pPr>
             <a:r>
@@ -5466,7 +5228,7 @@
           <a:bodyPr wrap="square" lIns="0" tIns="0" rIns="0" bIns="0" rtlCol="0" anchor="ctr"/>
           <a:lstStyle/>
           <a:p>
-            <a:pPr indent="0" marL="0">
+            <a:pPr marL="0" indent="0">
               <a:buNone/>
             </a:pPr>
             <a:r>
@@ -5505,7 +5267,7 @@
           <a:bodyPr wrap="square" lIns="0" tIns="0" rIns="0" bIns="0" rtlCol="0" anchor="ctr"/>
           <a:lstStyle/>
           <a:p>
-            <a:pPr indent="0" marL="0">
+            <a:pPr marL="0" indent="0">
               <a:buNone/>
             </a:pPr>
             <a:r>
@@ -5619,7 +5381,7 @@
           <a:bodyPr wrap="square" lIns="0" tIns="0" rIns="0" bIns="0" rtlCol="0" anchor="ctr"/>
           <a:lstStyle/>
           <a:p>
-            <a:pPr indent="0" marL="0">
+            <a:pPr marL="0" indent="0">
               <a:buNone/>
             </a:pPr>
             <a:r>
@@ -5658,7 +5420,7 @@
           <a:bodyPr wrap="square" lIns="0" tIns="0" rIns="0" bIns="0" rtlCol="0" anchor="ctr"/>
           <a:lstStyle/>
           <a:p>
-            <a:pPr indent="0" marL="0">
+            <a:pPr marL="0" indent="0">
               <a:buNone/>
             </a:pPr>
             <a:r>
@@ -5697,7 +5459,7 @@
           <a:bodyPr wrap="square" lIns="0" tIns="0" rIns="0" bIns="0" rtlCol="0" anchor="ctr"/>
           <a:lstStyle/>
           <a:p>
-            <a:pPr indent="0" marL="0">
+            <a:pPr marL="0" indent="0">
               <a:buNone/>
             </a:pPr>
             <a:r>
@@ -5811,7 +5573,7 @@
           <a:bodyPr wrap="square" lIns="0" tIns="0" rIns="0" bIns="0" rtlCol="0" anchor="ctr"/>
           <a:lstStyle/>
           <a:p>
-            <a:pPr indent="0" marL="0">
+            <a:pPr marL="0" indent="0">
               <a:buNone/>
             </a:pPr>
             <a:r>
@@ -5850,7 +5612,7 @@
           <a:bodyPr wrap="square" lIns="0" tIns="0" rIns="0" bIns="0" rtlCol="0" anchor="ctr"/>
           <a:lstStyle/>
           <a:p>
-            <a:pPr indent="0" marL="0">
+            <a:pPr marL="0" indent="0">
               <a:buNone/>
             </a:pPr>
             <a:r>
@@ -5889,7 +5651,7 @@
           <a:bodyPr wrap="square" lIns="0" tIns="0" rIns="0" bIns="0" rtlCol="0" anchor="ctr"/>
           <a:lstStyle/>
           <a:p>
-            <a:pPr indent="0" marL="0">
+            <a:pPr marL="0" indent="0">
               <a:buNone/>
             </a:pPr>
             <a:r>
@@ -5953,7 +5715,7 @@
           <a:bodyPr wrap="square" lIns="0" tIns="0" rIns="0" bIns="0" rtlCol="0" anchor="ctr"/>
           <a:lstStyle/>
           <a:p>
-            <a:pPr indent="0" marL="0">
+            <a:pPr marL="0" indent="0">
               <a:buNone/>
             </a:pPr>
             <a:r>
@@ -5992,7 +5754,7 @@
           <a:bodyPr wrap="square" lIns="0" tIns="0" rIns="0" bIns="0" rtlCol="0" anchor="ctr"/>
           <a:lstStyle/>
           <a:p>
-            <a:pPr indent="0" marL="0">
+            <a:pPr marL="0" indent="0">
               <a:buNone/>
             </a:pPr>
             <a:r>
@@ -6009,7 +5771,7 @@
             <a:endParaRPr lang="en-US" sz="950" dirty="0"/>
           </a:p>
           <a:p>
-            <a:pPr indent="0" marL="0">
+            <a:pPr marL="0" indent="0">
               <a:buNone/>
             </a:pPr>
             <a:r>
@@ -6073,7 +5835,7 @@
           <a:bodyPr wrap="square" lIns="0" tIns="0" rIns="0" bIns="0" rtlCol="0" anchor="ctr"/>
           <a:lstStyle/>
           <a:p>
-            <a:pPr indent="0" marL="0">
+            <a:pPr marL="0" indent="0">
               <a:buNone/>
             </a:pPr>
             <a:r>
@@ -6107,6 +5869,7 @@
         <a:solidFill>
           <a:srgbClr val="F4FBF7"/>
         </a:solidFill>
+        <a:effectLst/>
       </p:bgPr>
     </p:bg>
     <p:spTree>
@@ -6169,7 +5932,7 @@
           <a:bodyPr wrap="square" lIns="0" tIns="0" rIns="0" bIns="0" rtlCol="0" anchor="ctr"/>
           <a:lstStyle/>
           <a:p>
-            <a:pPr indent="0" marL="0">
+            <a:pPr marL="0" indent="0">
               <a:buNone/>
             </a:pPr>
             <a:r>
@@ -6208,7 +5971,7 @@
           <a:bodyPr wrap="square" lIns="0" tIns="0" rIns="0" bIns="0" rtlCol="0" anchor="ctr"/>
           <a:lstStyle/>
           <a:p>
-            <a:pPr indent="0" marL="0">
+            <a:pPr marL="0" indent="0">
               <a:buNone/>
             </a:pPr>
             <a:r>
@@ -6247,7 +6010,7 @@
           <a:bodyPr wrap="square" lIns="0" tIns="0" rIns="0" bIns="0" rtlCol="0" anchor="ctr"/>
           <a:lstStyle/>
           <a:p>
-            <a:pPr indent="0" marL="0">
+            <a:pPr marL="0" indent="0">
               <a:buNone/>
             </a:pPr>
             <a:r>
@@ -6311,7 +6074,7 @@
           <a:bodyPr wrap="square" lIns="0" tIns="0" rIns="0" bIns="0" rtlCol="0" anchor="ctr"/>
           <a:lstStyle/>
           <a:p>
-            <a:pPr indent="0" marL="0">
+            <a:pPr marL="0" indent="0">
               <a:buNone/>
             </a:pPr>
             <a:r>
@@ -6353,7 +6116,7 @@
             <a:prstDash val="solid"/>
           </a:ln>
           <a:effectLst>
-            <a:outerShdw sx="100000" sy="100000" kx="0" ky="0" algn="bl" rotWithShape="0" blurRad="101600" dist="38100" dir="8100000">
+            <a:outerShdw blurRad="101600" dist="38100" dir="8100000" algn="bl" rotWithShape="0">
               <a:srgbClr val="7DAA8C">
                 <a:alpha val="13000"/>
               </a:srgbClr>
@@ -6407,7 +6170,7 @@
           <a:bodyPr wrap="square" lIns="0" tIns="0" rIns="0" bIns="0" rtlCol="0" anchor="ctr"/>
           <a:lstStyle/>
           <a:p>
-            <a:pPr indent="0" marL="0">
+            <a:pPr marL="0" indent="0">
               <a:buNone/>
             </a:pPr>
             <a:r>
@@ -6496,7 +6259,7 @@
           <a:bodyPr wrap="square" lIns="0" tIns="0" rIns="0" bIns="0" rtlCol="0" anchor="ctr"/>
           <a:lstStyle/>
           <a:p>
-            <a:pPr indent="0" marL="0">
+            <a:pPr marL="0" indent="0">
               <a:buNone/>
             </a:pPr>
             <a:r>
@@ -6535,7 +6298,7 @@
           <a:bodyPr wrap="square" lIns="0" tIns="0" rIns="0" bIns="0" rtlCol="0" anchor="ctr"/>
           <a:lstStyle/>
           <a:p>
-            <a:pPr indent="0" marL="0">
+            <a:pPr marL="0" indent="0">
               <a:buNone/>
             </a:pPr>
             <a:r>
@@ -6624,7 +6387,7 @@
           <a:bodyPr wrap="square" lIns="0" tIns="0" rIns="0" bIns="0" rtlCol="0" anchor="ctr"/>
           <a:lstStyle/>
           <a:p>
-            <a:pPr indent="0" marL="0">
+            <a:pPr marL="0" indent="0">
               <a:buNone/>
             </a:pPr>
             <a:r>
@@ -6663,7 +6426,7 @@
           <a:bodyPr wrap="square" lIns="0" tIns="0" rIns="0" bIns="0" rtlCol="0" anchor="ctr"/>
           <a:lstStyle/>
           <a:p>
-            <a:pPr indent="0" marL="0">
+            <a:pPr marL="0" indent="0">
               <a:buNone/>
             </a:pPr>
             <a:r>
@@ -6752,7 +6515,7 @@
           <a:bodyPr wrap="square" lIns="0" tIns="0" rIns="0" bIns="0" rtlCol="0" anchor="ctr"/>
           <a:lstStyle/>
           <a:p>
-            <a:pPr indent="0" marL="0">
+            <a:pPr marL="0" indent="0">
               <a:buNone/>
             </a:pPr>
             <a:r>
@@ -6791,7 +6554,7 @@
           <a:bodyPr wrap="square" lIns="0" tIns="0" rIns="0" bIns="0" rtlCol="0" anchor="ctr"/>
           <a:lstStyle/>
           <a:p>
-            <a:pPr indent="0" marL="0">
+            <a:pPr marL="0" indent="0">
               <a:buNone/>
             </a:pPr>
             <a:r>
@@ -6833,7 +6596,7 @@
             <a:prstDash val="solid"/>
           </a:ln>
           <a:effectLst>
-            <a:outerShdw sx="100000" sy="100000" kx="0" ky="0" algn="bl" rotWithShape="0" blurRad="101600" dist="38100" dir="8100000">
+            <a:outerShdw blurRad="101600" dist="38100" dir="8100000" algn="bl" rotWithShape="0">
               <a:srgbClr val="7DAA8C">
                 <a:alpha val="13000"/>
               </a:srgbClr>
@@ -6887,7 +6650,7 @@
           <a:bodyPr wrap="square" lIns="0" tIns="0" rIns="0" bIns="0" rtlCol="0" anchor="ctr"/>
           <a:lstStyle/>
           <a:p>
-            <a:pPr indent="0" marL="0">
+            <a:pPr marL="0" indent="0">
               <a:buNone/>
             </a:pPr>
             <a:r>
@@ -6951,7 +6714,7 @@
           <a:bodyPr wrap="square" lIns="0" tIns="0" rIns="0" bIns="0" rtlCol="0" anchor="ctr"/>
           <a:lstStyle/>
           <a:p>
-            <a:pPr indent="0" marL="0">
+            <a:pPr marL="0" indent="0">
               <a:buNone/>
             </a:pPr>
             <a:r>
@@ -7015,7 +6778,7 @@
           <a:bodyPr wrap="square" lIns="0" tIns="0" rIns="0" bIns="0" rtlCol="0" anchor="ctr"/>
           <a:lstStyle/>
           <a:p>
-            <a:pPr indent="0" marL="0">
+            <a:pPr marL="0" indent="0">
               <a:buNone/>
             </a:pPr>
             <a:r>
@@ -7079,7 +6842,7 @@
           <a:bodyPr wrap="square" lIns="0" tIns="0" rIns="0" bIns="0" rtlCol="0" anchor="ctr"/>
           <a:lstStyle/>
           <a:p>
-            <a:pPr indent="0" marL="0">
+            <a:pPr marL="0" indent="0">
               <a:buNone/>
             </a:pPr>
             <a:r>
@@ -7143,7 +6906,7 @@
           <a:bodyPr wrap="square" lIns="0" tIns="0" rIns="0" bIns="0" rtlCol="0" anchor="ctr"/>
           <a:lstStyle/>
           <a:p>
-            <a:pPr indent="0" marL="0">
+            <a:pPr marL="0" indent="0">
               <a:buNone/>
             </a:pPr>
             <a:r>
@@ -7207,7 +6970,7 @@
           <a:bodyPr wrap="square" lIns="0" tIns="0" rIns="0" bIns="0" rtlCol="0" anchor="ctr"/>
           <a:lstStyle/>
           <a:p>
-            <a:pPr indent="0" marL="0">
+            <a:pPr marL="0" indent="0">
               <a:buNone/>
             </a:pPr>
             <a:r>
@@ -7271,7 +7034,7 @@
           <a:bodyPr wrap="square" lIns="0" tIns="0" rIns="0" bIns="0" rtlCol="0" anchor="ctr"/>
           <a:lstStyle/>
           <a:p>
-            <a:pPr indent="0" marL="0">
+            <a:pPr marL="0" indent="0">
               <a:buNone/>
             </a:pPr>
             <a:r>
@@ -7335,7 +7098,7 @@
           <a:bodyPr wrap="square" lIns="0" tIns="0" rIns="0" bIns="0" rtlCol="0" anchor="ctr"/>
           <a:lstStyle/>
           <a:p>
-            <a:pPr indent="0" marL="0">
+            <a:pPr marL="0" indent="0">
               <a:buNone/>
             </a:pPr>
             <a:r>
@@ -7399,7 +7162,7 @@
           <a:bodyPr wrap="square" lIns="0" tIns="0" rIns="0" bIns="0" rtlCol="0" anchor="ctr"/>
           <a:lstStyle/>
           <a:p>
-            <a:pPr indent="0" marL="0">
+            <a:pPr marL="0" indent="0">
               <a:buNone/>
             </a:pPr>
             <a:r>
@@ -7441,7 +7204,7 @@
             <a:prstDash val="solid"/>
           </a:ln>
           <a:effectLst>
-            <a:outerShdw sx="100000" sy="100000" kx="0" ky="0" algn="bl" rotWithShape="0" blurRad="101600" dist="38100" dir="8100000">
+            <a:outerShdw blurRad="101600" dist="38100" dir="8100000" algn="bl" rotWithShape="0">
               <a:srgbClr val="7DAA8C">
                 <a:alpha val="13000"/>
               </a:srgbClr>
@@ -7495,7 +7258,7 @@
           <a:bodyPr wrap="square" lIns="0" tIns="0" rIns="0" bIns="0" rtlCol="0" anchor="ctr"/>
           <a:lstStyle/>
           <a:p>
-            <a:pPr indent="0" marL="0">
+            <a:pPr marL="0" indent="0">
               <a:buNone/>
             </a:pPr>
             <a:r>
@@ -7559,7 +7322,7 @@
           <a:bodyPr wrap="square" lIns="0" tIns="0" rIns="0" bIns="0" rtlCol="0" anchor="ctr"/>
           <a:lstStyle/>
           <a:p>
-            <a:pPr indent="0" marL="0">
+            <a:pPr marL="0" indent="0">
               <a:buNone/>
             </a:pPr>
             <a:r>
@@ -7598,7 +7361,7 @@
           <a:bodyPr wrap="square" lIns="0" tIns="0" rIns="0" bIns="0" rtlCol="0" anchor="ctr"/>
           <a:lstStyle/>
           <a:p>
-            <a:pPr indent="0" marL="0">
+            <a:pPr marL="0" indent="0">
               <a:buNone/>
             </a:pPr>
             <a:r>
@@ -7637,7 +7400,7 @@
           <a:bodyPr wrap="square" lIns="0" tIns="0" rIns="0" bIns="0" rtlCol="0" anchor="ctr"/>
           <a:lstStyle/>
           <a:p>
-            <a:pPr indent="0" marL="0">
+            <a:pPr marL="0" indent="0">
               <a:buNone/>
             </a:pPr>
             <a:r>
@@ -7701,7 +7464,7 @@
           <a:bodyPr wrap="square" lIns="0" tIns="0" rIns="0" bIns="0" rtlCol="0" anchor="ctr"/>
           <a:lstStyle/>
           <a:p>
-            <a:pPr indent="0" marL="0">
+            <a:pPr marL="0" indent="0">
               <a:buNone/>
             </a:pPr>
             <a:r>
@@ -7740,7 +7503,7 @@
           <a:bodyPr wrap="square" lIns="0" tIns="0" rIns="0" bIns="0" rtlCol="0" anchor="ctr"/>
           <a:lstStyle/>
           <a:p>
-            <a:pPr indent="0" marL="0">
+            <a:pPr marL="0" indent="0">
               <a:buNone/>
             </a:pPr>
             <a:r>
@@ -7779,7 +7542,7 @@
           <a:bodyPr wrap="square" lIns="0" tIns="0" rIns="0" bIns="0" rtlCol="0" anchor="ctr"/>
           <a:lstStyle/>
           <a:p>
-            <a:pPr indent="0" marL="0">
+            <a:pPr marL="0" indent="0">
               <a:buNone/>
             </a:pPr>
             <a:r>
@@ -7843,7 +7606,7 @@
           <a:bodyPr wrap="square" lIns="0" tIns="0" rIns="0" bIns="0" rtlCol="0" anchor="ctr"/>
           <a:lstStyle/>
           <a:p>
-            <a:pPr indent="0" marL="0">
+            <a:pPr marL="0" indent="0">
               <a:buNone/>
             </a:pPr>
             <a:r>
@@ -7882,7 +7645,7 @@
           <a:bodyPr wrap="square" lIns="0" tIns="0" rIns="0" bIns="0" rtlCol="0" anchor="ctr"/>
           <a:lstStyle/>
           <a:p>
-            <a:pPr indent="0" marL="0">
+            <a:pPr marL="0" indent="0">
               <a:buNone/>
             </a:pPr>
             <a:r>
@@ -7921,7 +7684,7 @@
           <a:bodyPr wrap="square" lIns="0" tIns="0" rIns="0" bIns="0" rtlCol="0" anchor="ctr"/>
           <a:lstStyle/>
           <a:p>
-            <a:pPr indent="0" marL="0">
+            <a:pPr marL="0" indent="0">
               <a:buNone/>
             </a:pPr>
             <a:r>
@@ -7985,7 +7748,7 @@
           <a:bodyPr wrap="square" lIns="0" tIns="0" rIns="0" bIns="0" rtlCol="0" anchor="ctr"/>
           <a:lstStyle/>
           <a:p>
-            <a:pPr indent="0" marL="0">
+            <a:pPr marL="0" indent="0">
               <a:buNone/>
             </a:pPr>
             <a:r>
@@ -8024,7 +7787,7 @@
           <a:bodyPr wrap="square" lIns="0" tIns="0" rIns="0" bIns="0" rtlCol="0" anchor="ctr"/>
           <a:lstStyle/>
           <a:p>
-            <a:pPr indent="0" marL="0">
+            <a:pPr marL="0" indent="0">
               <a:buNone/>
             </a:pPr>
             <a:r>
@@ -8063,7 +7826,7 @@
           <a:bodyPr wrap="square" lIns="0" tIns="0" rIns="0" bIns="0" rtlCol="0" anchor="ctr"/>
           <a:lstStyle/>
           <a:p>
-            <a:pPr indent="0" marL="0">
+            <a:pPr marL="0" indent="0">
               <a:buNone/>
             </a:pPr>
             <a:r>
@@ -8105,7 +7868,7 @@
             <a:prstDash val="solid"/>
           </a:ln>
           <a:effectLst>
-            <a:outerShdw sx="100000" sy="100000" kx="0" ky="0" algn="bl" rotWithShape="0" blurRad="101600" dist="38100" dir="8100000">
+            <a:outerShdw blurRad="101600" dist="38100" dir="8100000" algn="bl" rotWithShape="0">
               <a:srgbClr val="7DAA8C">
                 <a:alpha val="13000"/>
               </a:srgbClr>
@@ -8159,7 +7922,7 @@
           <a:bodyPr wrap="square" lIns="0" tIns="0" rIns="0" bIns="0" rtlCol="0" anchor="ctr"/>
           <a:lstStyle/>
           <a:p>
-            <a:pPr indent="0" marL="0">
+            <a:pPr marL="0" indent="0">
               <a:buNone/>
             </a:pPr>
             <a:r>
@@ -8223,7 +7986,7 @@
           <a:bodyPr wrap="square" lIns="0" tIns="0" rIns="0" bIns="0" rtlCol="0" anchor="ctr"/>
           <a:lstStyle/>
           <a:p>
-            <a:pPr indent="0" marL="0">
+            <a:pPr marL="0" indent="0">
               <a:buNone/>
             </a:pPr>
             <a:r>
@@ -8262,7 +8025,7 @@
           <a:bodyPr wrap="square" lIns="0" tIns="0" rIns="0" bIns="0" rtlCol="0" anchor="ctr"/>
           <a:lstStyle/>
           <a:p>
-            <a:pPr indent="0" marL="0">
+            <a:pPr marL="0" indent="0">
               <a:buNone/>
             </a:pPr>
             <a:r>
@@ -8326,7 +8089,7 @@
           <a:bodyPr wrap="square" lIns="0" tIns="0" rIns="0" bIns="0" rtlCol="0" anchor="ctr"/>
           <a:lstStyle/>
           <a:p>
-            <a:pPr indent="0" marL="0">
+            <a:pPr marL="0" indent="0">
               <a:buNone/>
             </a:pPr>
             <a:r>
@@ -8365,7 +8128,7 @@
           <a:bodyPr wrap="square" lIns="0" tIns="0" rIns="0" bIns="0" rtlCol="0" anchor="ctr"/>
           <a:lstStyle/>
           <a:p>
-            <a:pPr indent="0" marL="0">
+            <a:pPr marL="0" indent="0">
               <a:buNone/>
             </a:pPr>
             <a:r>
@@ -8429,7 +8192,7 @@
           <a:bodyPr wrap="square" lIns="0" tIns="0" rIns="0" bIns="0" rtlCol="0" anchor="ctr"/>
           <a:lstStyle/>
           <a:p>
-            <a:pPr indent="0" marL="0">
+            <a:pPr marL="0" indent="0">
               <a:buNone/>
             </a:pPr>
             <a:r>
@@ -8468,7 +8231,7 @@
           <a:bodyPr wrap="square" lIns="0" tIns="0" rIns="0" bIns="0" rtlCol="0" anchor="ctr"/>
           <a:lstStyle/>
           <a:p>
-            <a:pPr indent="0" marL="0">
+            <a:pPr marL="0" indent="0">
               <a:buNone/>
             </a:pPr>
             <a:r>
@@ -8532,7 +8295,7 @@
           <a:bodyPr wrap="square" lIns="0" tIns="0" rIns="0" bIns="0" rtlCol="0" anchor="ctr"/>
           <a:lstStyle/>
           <a:p>
-            <a:pPr indent="0" marL="0">
+            <a:pPr marL="0" indent="0">
               <a:buNone/>
             </a:pPr>
             <a:r>
@@ -8566,6 +8329,7 @@
         <a:solidFill>
           <a:srgbClr val="1A2B3C"/>
         </a:solidFill>
+        <a:effectLst/>
       </p:bgPr>
     </p:bg>
     <p:spTree>
@@ -8618,7 +8382,7 @@
             <a:off x="237744" y="137160"/>
             <a:ext cx="155448" cy="155448"/>
           </a:xfrm>
-          <a:prstGeom prst="oval">
+          <a:prstGeom prst="line">
             <a:avLst/>
           </a:prstGeom>
           <a:solidFill>
@@ -8643,7 +8407,7 @@
             <a:off x="512064" y="137160"/>
             <a:ext cx="155448" cy="155448"/>
           </a:xfrm>
-          <a:prstGeom prst="oval">
+          <a:prstGeom prst="line">
             <a:avLst/>
           </a:prstGeom>
           <a:solidFill>
@@ -8668,7 +8432,7 @@
             <a:off x="786384" y="137160"/>
             <a:ext cx="155448" cy="155448"/>
           </a:xfrm>
-          <a:prstGeom prst="oval">
+          <a:prstGeom prst="line">
             <a:avLst/>
           </a:prstGeom>
           <a:solidFill>
@@ -8703,7 +8467,7 @@
           <a:bodyPr wrap="square" lIns="0" tIns="0" rIns="0" bIns="0" rtlCol="0" anchor="ctr"/>
           <a:lstStyle/>
           <a:p>
-            <a:pPr algn="ctr" indent="0" marL="0">
+            <a:pPr marL="0" indent="0" algn="ctr">
               <a:buNone/>
             </a:pPr>
             <a:r>
@@ -8792,7 +8556,7 @@
           <a:bodyPr wrap="square" lIns="0" tIns="0" rIns="0" bIns="0" rtlCol="0" anchor="ctr"/>
           <a:lstStyle/>
           <a:p>
-            <a:pPr indent="0" marL="0">
+            <a:pPr marL="0" indent="0">
               <a:buNone/>
             </a:pPr>
             <a:r>
@@ -8831,7 +8595,7 @@
           <a:bodyPr wrap="square" lIns="0" tIns="0" rIns="0" bIns="0" rtlCol="0" anchor="ctr"/>
           <a:lstStyle/>
           <a:p>
-            <a:pPr indent="0" marL="0">
+            <a:pPr marL="0" indent="0">
               <a:buNone/>
             </a:pPr>
             <a:r>
@@ -8870,7 +8634,7 @@
           <a:bodyPr wrap="square" lIns="0" tIns="0" rIns="0" bIns="0" rtlCol="0" anchor="ctr"/>
           <a:lstStyle/>
           <a:p>
-            <a:pPr indent="0" marL="0">
+            <a:pPr marL="0" indent="0">
               <a:buNone/>
             </a:pPr>
             <a:r>
@@ -8909,7 +8673,7 @@
           <a:bodyPr wrap="square" lIns="0" tIns="0" rIns="0" bIns="0" rtlCol="0" anchor="ctr"/>
           <a:lstStyle/>
           <a:p>
-            <a:pPr indent="0" marL="0">
+            <a:pPr marL="0" indent="0">
               <a:buNone/>
             </a:pPr>
             <a:r>
@@ -8948,7 +8712,7 @@
           <a:bodyPr wrap="square" lIns="0" tIns="0" rIns="0" bIns="0" rtlCol="0" anchor="ctr"/>
           <a:lstStyle/>
           <a:p>
-            <a:pPr indent="0" marL="0">
+            <a:pPr marL="0" indent="0">
               <a:buNone/>
             </a:pPr>
             <a:r>
@@ -8987,7 +8751,7 @@
           <a:bodyPr wrap="square" lIns="0" tIns="0" rIns="0" bIns="0" rtlCol="0" anchor="ctr"/>
           <a:lstStyle/>
           <a:p>
-            <a:pPr indent="0" marL="0">
+            <a:pPr marL="0" indent="0">
               <a:buNone/>
             </a:pPr>
             <a:r>
@@ -9026,7 +8790,7 @@
           <a:bodyPr wrap="square" lIns="0" tIns="0" rIns="0" bIns="0" rtlCol="0" anchor="ctr"/>
           <a:lstStyle/>
           <a:p>
-            <a:pPr indent="0" marL="0">
+            <a:pPr marL="0" indent="0">
               <a:buNone/>
             </a:pPr>
             <a:r>
@@ -9115,7 +8879,7 @@
           <a:bodyPr wrap="square" lIns="0" tIns="0" rIns="0" bIns="0" rtlCol="0" anchor="ctr"/>
           <a:lstStyle/>
           <a:p>
-            <a:pPr indent="0" marL="0">
+            <a:pPr marL="0" indent="0">
               <a:buNone/>
             </a:pPr>
             <a:r>
@@ -9154,7 +8918,7 @@
           <a:bodyPr wrap="square" lIns="0" tIns="0" rIns="0" bIns="0" rtlCol="0" anchor="ctr"/>
           <a:lstStyle/>
           <a:p>
-            <a:pPr indent="0" marL="0">
+            <a:pPr marL="0" indent="0">
               <a:buNone/>
             </a:pPr>
             <a:r>
@@ -9193,7 +8957,7 @@
           <a:bodyPr wrap="square" lIns="0" tIns="0" rIns="0" bIns="0" rtlCol="0" anchor="ctr"/>
           <a:lstStyle/>
           <a:p>
-            <a:pPr indent="0" marL="0">
+            <a:pPr marL="0" indent="0">
               <a:buNone/>
             </a:pPr>
             <a:r>
@@ -9232,7 +8996,7 @@
           <a:bodyPr wrap="square" lIns="0" tIns="0" rIns="0" bIns="0" rtlCol="0" anchor="ctr"/>
           <a:lstStyle/>
           <a:p>
-            <a:pPr indent="0" marL="0">
+            <a:pPr marL="0" indent="0">
               <a:buNone/>
             </a:pPr>
             <a:r>
@@ -9271,7 +9035,7 @@
           <a:bodyPr wrap="square" lIns="0" tIns="0" rIns="0" bIns="0" rtlCol="0" anchor="ctr"/>
           <a:lstStyle/>
           <a:p>
-            <a:pPr indent="0" marL="0">
+            <a:pPr marL="0" indent="0">
               <a:buNone/>
             </a:pPr>
             <a:r>
@@ -9310,7 +9074,7 @@
           <a:bodyPr wrap="square" lIns="0" tIns="0" rIns="0" bIns="0" rtlCol="0" anchor="ctr"/>
           <a:lstStyle/>
           <a:p>
-            <a:pPr indent="0" marL="0">
+            <a:pPr marL="0" indent="0">
               <a:buNone/>
             </a:pPr>
             <a:r>
@@ -9349,7 +9113,7 @@
           <a:bodyPr wrap="square" lIns="0" tIns="0" rIns="0" bIns="0" rtlCol="0" anchor="ctr"/>
           <a:lstStyle/>
           <a:p>
-            <a:pPr indent="0" marL="0">
+            <a:pPr marL="0" indent="0">
               <a:buNone/>
             </a:pPr>
             <a:r>
@@ -9438,7 +9202,7 @@
           <a:bodyPr wrap="square" lIns="0" tIns="0" rIns="0" bIns="0" rtlCol="0" anchor="ctr"/>
           <a:lstStyle/>
           <a:p>
-            <a:pPr indent="0" marL="0">
+            <a:pPr marL="0" indent="0">
               <a:buNone/>
             </a:pPr>
             <a:r>
@@ -9477,7 +9241,7 @@
           <a:bodyPr wrap="square" lIns="0" tIns="0" rIns="0" bIns="0" rtlCol="0" anchor="ctr"/>
           <a:lstStyle/>
           <a:p>
-            <a:pPr indent="0" marL="0">
+            <a:pPr marL="0" indent="0">
               <a:buNone/>
             </a:pPr>
             <a:r>
@@ -9516,7 +9280,7 @@
           <a:bodyPr wrap="square" lIns="0" tIns="0" rIns="0" bIns="0" rtlCol="0" anchor="ctr"/>
           <a:lstStyle/>
           <a:p>
-            <a:pPr indent="0" marL="0">
+            <a:pPr marL="0" indent="0">
               <a:buNone/>
             </a:pPr>
             <a:r>
@@ -9555,7 +9319,7 @@
           <a:bodyPr wrap="square" lIns="0" tIns="0" rIns="0" bIns="0" rtlCol="0" anchor="ctr"/>
           <a:lstStyle/>
           <a:p>
-            <a:pPr indent="0" marL="0">
+            <a:pPr marL="0" indent="0">
               <a:buNone/>
             </a:pPr>
             <a:r>
@@ -9594,7 +9358,7 @@
           <a:bodyPr wrap="square" lIns="0" tIns="0" rIns="0" bIns="0" rtlCol="0" anchor="ctr"/>
           <a:lstStyle/>
           <a:p>
-            <a:pPr indent="0" marL="0">
+            <a:pPr marL="0" indent="0">
               <a:buNone/>
             </a:pPr>
             <a:r>
@@ -9633,7 +9397,7 @@
           <a:bodyPr wrap="square" lIns="0" tIns="0" rIns="0" bIns="0" rtlCol="0" anchor="ctr"/>
           <a:lstStyle/>
           <a:p>
-            <a:pPr indent="0" marL="0">
+            <a:pPr marL="0" indent="0">
               <a:buNone/>
             </a:pPr>
             <a:r>
@@ -9672,7 +9436,7 @@
           <a:bodyPr wrap="square" lIns="0" tIns="0" rIns="0" bIns="0" rtlCol="0" anchor="ctr"/>
           <a:lstStyle/>
           <a:p>
-            <a:pPr indent="0" marL="0">
+            <a:pPr marL="0" indent="0">
               <a:buNone/>
             </a:pPr>
             <a:r>
@@ -9706,6 +9470,7 @@
         <a:solidFill>
           <a:srgbClr val="FFFFFF"/>
         </a:solidFill>
+        <a:effectLst/>
       </p:bgPr>
     </p:bg>
     <p:spTree>
@@ -9783,7 +9548,7 @@
             <a:off x="91440" y="2651760"/>
             <a:ext cx="3566160" cy="3566160"/>
           </a:xfrm>
-          <a:prstGeom prst="oval">
+          <a:prstGeom prst="line">
             <a:avLst/>
           </a:prstGeom>
           <a:solidFill>
@@ -9822,7 +9587,7 @@
           <a:bodyPr wrap="square" lIns="0" tIns="0" rIns="0" bIns="0" rtlCol="0" anchor="ctr"/>
           <a:lstStyle/>
           <a:p>
-            <a:pPr indent="0" marL="0">
+            <a:pPr marL="0" indent="0">
               <a:lnSpc>
                 <a:spcPct val="108000"/>
               </a:lnSpc>
@@ -9842,7 +9607,7 @@
             <a:endParaRPr lang="en-US" sz="3000" dirty="0"/>
           </a:p>
           <a:p>
-            <a:pPr indent="0" marL="0">
+            <a:pPr marL="0" indent="0">
               <a:lnSpc>
                 <a:spcPct val="108000"/>
               </a:lnSpc>
@@ -9907,7 +9672,7 @@
           <a:bodyPr wrap="square" lIns="0" tIns="0" rIns="0" bIns="0" rtlCol="0" anchor="ctr"/>
           <a:lstStyle/>
           <a:p>
-            <a:pPr indent="0" marL="0">
+            <a:pPr marL="0" indent="0">
               <a:buNone/>
             </a:pPr>
             <a:r>
@@ -9946,7 +9711,7 @@
           <a:bodyPr wrap="square" lIns="0" tIns="0" rIns="0" bIns="0" rtlCol="0" anchor="ctr"/>
           <a:lstStyle/>
           <a:p>
-            <a:pPr indent="0" marL="0">
+            <a:pPr marL="0" indent="0">
               <a:buNone/>
             </a:pPr>
             <a:r>
@@ -9985,7 +9750,7 @@
           <a:bodyPr wrap="square" lIns="0" tIns="0" rIns="0" bIns="0" rtlCol="0" anchor="ctr"/>
           <a:lstStyle/>
           <a:p>
-            <a:pPr indent="0" marL="0">
+            <a:pPr marL="0" indent="0">
               <a:buNone/>
             </a:pPr>
             <a:r>
@@ -10050,7 +9815,7 @@
             <a:prstDash val="solid"/>
           </a:ln>
           <a:effectLst>
-            <a:outerShdw sx="100000" sy="100000" kx="0" ky="0" algn="bl" rotWithShape="0" blurRad="101600" dist="38100" dir="8100000">
+            <a:outerShdw blurRad="101600" dist="38100" dir="8100000" algn="bl" rotWithShape="0">
               <a:srgbClr val="7DAA8C">
                 <a:alpha val="13000"/>
               </a:srgbClr>
@@ -10129,7 +9894,7 @@
           <a:bodyPr wrap="square" lIns="0" tIns="0" rIns="0" bIns="0" rtlCol="0" anchor="ctr"/>
           <a:lstStyle/>
           <a:p>
-            <a:pPr algn="ctr" indent="0" marL="0">
+            <a:pPr marL="0" indent="0" algn="ctr">
               <a:buNone/>
             </a:pPr>
             <a:r>
@@ -10168,7 +9933,7 @@
           <a:bodyPr wrap="square" lIns="0" tIns="0" rIns="0" bIns="0" rtlCol="0" anchor="ctr"/>
           <a:lstStyle/>
           <a:p>
-            <a:pPr indent="0" marL="0">
+            <a:pPr marL="0" indent="0">
               <a:buNone/>
             </a:pPr>
             <a:r>
@@ -10207,7 +9972,7 @@
           <a:bodyPr wrap="square" lIns="0" tIns="0" rIns="0" bIns="0" rtlCol="0" anchor="ctr"/>
           <a:lstStyle/>
           <a:p>
-            <a:pPr indent="0" marL="0">
+            <a:pPr marL="0" indent="0">
               <a:lnSpc>
                 <a:spcPct val="125000"/>
               </a:lnSpc>
@@ -10252,7 +10017,7 @@
             <a:prstDash val="solid"/>
           </a:ln>
           <a:effectLst>
-            <a:outerShdw sx="100000" sy="100000" kx="0" ky="0" algn="bl" rotWithShape="0" blurRad="101600" dist="38100" dir="8100000">
+            <a:outerShdw blurRad="101600" dist="38100" dir="8100000" algn="bl" rotWithShape="0">
               <a:srgbClr val="7DAA8C">
                 <a:alpha val="13000"/>
               </a:srgbClr>
@@ -10331,7 +10096,7 @@
           <a:bodyPr wrap="square" lIns="0" tIns="0" rIns="0" bIns="0" rtlCol="0" anchor="ctr"/>
           <a:lstStyle/>
           <a:p>
-            <a:pPr algn="ctr" indent="0" marL="0">
+            <a:pPr marL="0" indent="0" algn="ctr">
               <a:buNone/>
             </a:pPr>
             <a:r>
@@ -10370,7 +10135,7 @@
           <a:bodyPr wrap="square" lIns="0" tIns="0" rIns="0" bIns="0" rtlCol="0" anchor="ctr"/>
           <a:lstStyle/>
           <a:p>
-            <a:pPr indent="0" marL="0">
+            <a:pPr marL="0" indent="0">
               <a:buNone/>
             </a:pPr>
             <a:r>
@@ -10409,7 +10174,7 @@
           <a:bodyPr wrap="square" lIns="0" tIns="0" rIns="0" bIns="0" rtlCol="0" anchor="ctr"/>
           <a:lstStyle/>
           <a:p>
-            <a:pPr indent="0" marL="0">
+            <a:pPr marL="0" indent="0">
               <a:lnSpc>
                 <a:spcPct val="125000"/>
               </a:lnSpc>
@@ -10476,7 +10241,7 @@
           <a:bodyPr wrap="square" lIns="0" tIns="0" rIns="0" bIns="0" rtlCol="0" anchor="ctr"/>
           <a:lstStyle/>
           <a:p>
-            <a:pPr indent="0" marL="0">
+            <a:pPr marL="0" indent="0">
               <a:buNone/>
             </a:pPr>
             <a:r>
@@ -10505,7 +10270,7 @@
             <a:off x="4224528" y="3749040"/>
             <a:ext cx="109728" cy="109728"/>
           </a:xfrm>
-          <a:prstGeom prst="oval">
+          <a:prstGeom prst="line">
             <a:avLst/>
           </a:prstGeom>
           <a:solidFill>
@@ -10540,7 +10305,7 @@
           <a:bodyPr wrap="square" lIns="0" tIns="0" rIns="0" bIns="0" rtlCol="0" anchor="ctr"/>
           <a:lstStyle/>
           <a:p>
-            <a:pPr indent="0" marL="0">
+            <a:pPr marL="0" indent="0">
               <a:buNone/>
             </a:pPr>
             <a:r>
@@ -10569,7 +10334,7 @@
             <a:off x="4224528" y="3968496"/>
             <a:ext cx="109728" cy="109728"/>
           </a:xfrm>
-          <a:prstGeom prst="oval">
+          <a:prstGeom prst="line">
             <a:avLst/>
           </a:prstGeom>
           <a:solidFill>
@@ -10604,7 +10369,7 @@
           <a:bodyPr wrap="square" lIns="0" tIns="0" rIns="0" bIns="0" rtlCol="0" anchor="ctr"/>
           <a:lstStyle/>
           <a:p>
-            <a:pPr indent="0" marL="0">
+            <a:pPr marL="0" indent="0">
               <a:buNone/>
             </a:pPr>
             <a:r>
@@ -10633,7 +10398,7 @@
             <a:off x="4224528" y="4187952"/>
             <a:ext cx="109728" cy="109728"/>
           </a:xfrm>
-          <a:prstGeom prst="oval">
+          <a:prstGeom prst="line">
             <a:avLst/>
           </a:prstGeom>
           <a:solidFill>
@@ -10668,7 +10433,7 @@
           <a:bodyPr wrap="square" lIns="0" tIns="0" rIns="0" bIns="0" rtlCol="0" anchor="ctr"/>
           <a:lstStyle/>
           <a:p>
-            <a:pPr indent="0" marL="0">
+            <a:pPr marL="0" indent="0">
               <a:buNone/>
             </a:pPr>
             <a:r>
@@ -10732,7 +10497,7 @@
           <a:bodyPr wrap="square" lIns="0" tIns="0" rIns="0" bIns="0" rtlCol="0" anchor="ctr"/>
           <a:lstStyle/>
           <a:p>
-            <a:pPr indent="0" marL="0">
+            <a:pPr marL="0" indent="0">
               <a:buNone/>
             </a:pPr>
             <a:r>
@@ -11051,4 +10816,319 @@
     </a:ext>
   </a:extLst>
 </a:theme>
+</file>
+
+<file path=ppt/theme/theme2.xml><?xml version="1.0" encoding="utf-8"?>
+<a:theme xmlns:a="http://schemas.openxmlformats.org/drawingml/2006/main" name="Office Theme">
+  <a:themeElements>
+    <a:clrScheme name="Office">
+      <a:dk1>
+        <a:sysClr val="windowText" lastClr="000000"/>
+      </a:dk1>
+      <a:lt1>
+        <a:sysClr val="window" lastClr="FFFFFF"/>
+      </a:lt1>
+      <a:dk2>
+        <a:srgbClr val="0E2841"/>
+      </a:dk2>
+      <a:lt2>
+        <a:srgbClr val="E8E8E8"/>
+      </a:lt2>
+      <a:accent1>
+        <a:srgbClr val="156082"/>
+      </a:accent1>
+      <a:accent2>
+        <a:srgbClr val="E97132"/>
+      </a:accent2>
+      <a:accent3>
+        <a:srgbClr val="196B24"/>
+      </a:accent3>
+      <a:accent4>
+        <a:srgbClr val="0F9ED5"/>
+      </a:accent4>
+      <a:accent5>
+        <a:srgbClr val="A02B93"/>
+      </a:accent5>
+      <a:accent6>
+        <a:srgbClr val="4EA72E"/>
+      </a:accent6>
+      <a:hlink>
+        <a:srgbClr val="467886"/>
+      </a:hlink>
+      <a:folHlink>
+        <a:srgbClr val="96607D"/>
+      </a:folHlink>
+    </a:clrScheme>
+    <a:fontScheme name="Office">
+      <a:majorFont>
+        <a:latin typeface="Aptos Display" panose="02110004020202020204"/>
+        <a:ea typeface=""/>
+        <a:cs typeface=""/>
+        <a:font script="Jpan" typeface="游ゴシック Light"/>
+        <a:font script="Hang" typeface="맑은 고딕"/>
+        <a:font script="Hans" typeface="等线 Light"/>
+        <a:font script="Hant" typeface="新細明體"/>
+        <a:font script="Arab" typeface="Times New Roman"/>
+        <a:font script="Hebr" typeface="Times New Roman"/>
+        <a:font script="Thai" typeface="Angsana New"/>
+        <a:font script="Ethi" typeface="Nyala"/>
+        <a:font script="Beng" typeface="Vrinda"/>
+        <a:font script="Gujr" typeface="Shruti"/>
+        <a:font script="Khmr" typeface="MoolBoran"/>
+        <a:font script="Knda" typeface="Tunga"/>
+        <a:font script="Guru" typeface="Raavi"/>
+        <a:font script="Cans" typeface="Euphemia"/>
+        <a:font script="Cher" typeface="Plantagenet Cherokee"/>
+        <a:font script="Yiii" typeface="Microsoft Yi Baiti"/>
+        <a:font script="Tibt" typeface="Microsoft Himalaya"/>
+        <a:font script="Thaa" typeface="MV Boli"/>
+        <a:font script="Deva" typeface="Mangal"/>
+        <a:font script="Telu" typeface="Gautami"/>
+        <a:font script="Taml" typeface="Latha"/>
+        <a:font script="Syrc" typeface="Estrangelo Edessa"/>
+        <a:font script="Orya" typeface="Kalinga"/>
+        <a:font script="Mlym" typeface="Kartika"/>
+        <a:font script="Laoo" typeface="DokChampa"/>
+        <a:font script="Sinh" typeface="Iskoola Pota"/>
+        <a:font script="Mong" typeface="Mongolian Baiti"/>
+        <a:font script="Viet" typeface="Times New Roman"/>
+        <a:font script="Uigh" typeface="Microsoft Uighur"/>
+        <a:font script="Geor" typeface="Sylfaen"/>
+        <a:font script="Armn" typeface="Arial"/>
+        <a:font script="Bugi" typeface="Leelawadee UI"/>
+        <a:font script="Bopo" typeface="Microsoft JhengHei"/>
+        <a:font script="Java" typeface="Javanese Text"/>
+        <a:font script="Lisu" typeface="Segoe UI"/>
+        <a:font script="Mymr" typeface="Myanmar Text"/>
+        <a:font script="Nkoo" typeface="Ebrima"/>
+        <a:font script="Olck" typeface="Nirmala UI"/>
+        <a:font script="Osma" typeface="Ebrima"/>
+        <a:font script="Phag" typeface="Phagspa"/>
+        <a:font script="Syrn" typeface="Estrangelo Edessa"/>
+        <a:font script="Syrj" typeface="Estrangelo Edessa"/>
+        <a:font script="Syre" typeface="Estrangelo Edessa"/>
+        <a:font script="Sora" typeface="Nirmala UI"/>
+        <a:font script="Tale" typeface="Microsoft Tai Le"/>
+        <a:font script="Talu" typeface="Microsoft New Tai Lue"/>
+        <a:font script="Tfng" typeface="Ebrima"/>
+      </a:majorFont>
+      <a:minorFont>
+        <a:latin typeface="Aptos" panose="02110004020202020204"/>
+        <a:ea typeface=""/>
+        <a:cs typeface=""/>
+        <a:font script="Jpan" typeface="游ゴシック"/>
+        <a:font script="Hang" typeface="맑은 고딕"/>
+        <a:font script="Hans" typeface="等线"/>
+        <a:font script="Hant" typeface="新細明體"/>
+        <a:font script="Arab" typeface="Arial"/>
+        <a:font script="Hebr" typeface="Arial"/>
+        <a:font script="Thai" typeface="Cordia New"/>
+        <a:font script="Ethi" typeface="Nyala"/>
+        <a:font script="Beng" typeface="Vrinda"/>
+        <a:font script="Gujr" typeface="Shruti"/>
+        <a:font script="Khmr" typeface="DaunPenh"/>
+        <a:font script="Knda" typeface="Tunga"/>
+        <a:font script="Guru" typeface="Raavi"/>
+        <a:font script="Cans" typeface="Euphemia"/>
+        <a:font script="Cher" typeface="Plantagenet Cherokee"/>
+        <a:font script="Yiii" typeface="Microsoft Yi Baiti"/>
+        <a:font script="Tibt" typeface="Microsoft Himalaya"/>
+        <a:font script="Thaa" typeface="MV Boli"/>
+        <a:font script="Deva" typeface="Mangal"/>
+        <a:font script="Telu" typeface="Gautami"/>
+        <a:font script="Taml" typeface="Latha"/>
+        <a:font script="Syrc" typeface="Estrangelo Edessa"/>
+        <a:font script="Orya" typeface="Kalinga"/>
+        <a:font script="Mlym" typeface="Kartika"/>
+        <a:font script="Laoo" typeface="DokChampa"/>
+        <a:font script="Sinh" typeface="Iskoola Pota"/>
+        <a:font script="Mong" typeface="Mongolian Baiti"/>
+        <a:font script="Viet" typeface="Arial"/>
+        <a:font script="Uigh" typeface="Microsoft Uighur"/>
+        <a:font script="Geor" typeface="Sylfaen"/>
+        <a:font script="Armn" typeface="Arial"/>
+        <a:font script="Bugi" typeface="Leelawadee UI"/>
+        <a:font script="Bopo" typeface="Microsoft JhengHei"/>
+        <a:font script="Java" typeface="Javanese Text"/>
+        <a:font script="Lisu" typeface="Segoe UI"/>
+        <a:font script="Mymr" typeface="Myanmar Text"/>
+        <a:font script="Nkoo" typeface="Ebrima"/>
+        <a:font script="Olck" typeface="Nirmala UI"/>
+        <a:font script="Osma" typeface="Ebrima"/>
+        <a:font script="Phag" typeface="Phagspa"/>
+        <a:font script="Syrn" typeface="Estrangelo Edessa"/>
+        <a:font script="Syrj" typeface="Estrangelo Edessa"/>
+        <a:font script="Syre" typeface="Estrangelo Edessa"/>
+        <a:font script="Sora" typeface="Nirmala UI"/>
+        <a:font script="Tale" typeface="Microsoft Tai Le"/>
+        <a:font script="Talu" typeface="Microsoft New Tai Lue"/>
+        <a:font script="Tfng" typeface="Ebrima"/>
+      </a:minorFont>
+    </a:fontScheme>
+    <a:fmtScheme name="Office">
+      <a:fillStyleLst>
+        <a:solidFill>
+          <a:schemeClr val="phClr"/>
+        </a:solidFill>
+        <a:gradFill rotWithShape="1">
+          <a:gsLst>
+            <a:gs pos="0">
+              <a:schemeClr val="phClr">
+                <a:lumMod val="110000"/>
+                <a:satMod val="105000"/>
+                <a:tint val="67000"/>
+              </a:schemeClr>
+            </a:gs>
+            <a:gs pos="50000">
+              <a:schemeClr val="phClr">
+                <a:lumMod val="105000"/>
+                <a:satMod val="103000"/>
+                <a:tint val="73000"/>
+              </a:schemeClr>
+            </a:gs>
+            <a:gs pos="100000">
+              <a:schemeClr val="phClr">
+                <a:lumMod val="105000"/>
+                <a:satMod val="109000"/>
+                <a:tint val="81000"/>
+              </a:schemeClr>
+            </a:gs>
+          </a:gsLst>
+          <a:lin ang="5400000" scaled="0"/>
+        </a:gradFill>
+        <a:gradFill rotWithShape="1">
+          <a:gsLst>
+            <a:gs pos="0">
+              <a:schemeClr val="phClr">
+                <a:satMod val="103000"/>
+                <a:lumMod val="102000"/>
+                <a:tint val="94000"/>
+              </a:schemeClr>
+            </a:gs>
+            <a:gs pos="50000">
+              <a:schemeClr val="phClr">
+                <a:satMod val="110000"/>
+                <a:lumMod val="100000"/>
+                <a:shade val="100000"/>
+              </a:schemeClr>
+            </a:gs>
+            <a:gs pos="100000">
+              <a:schemeClr val="phClr">
+                <a:lumMod val="99000"/>
+                <a:satMod val="120000"/>
+                <a:shade val="78000"/>
+              </a:schemeClr>
+            </a:gs>
+          </a:gsLst>
+          <a:lin ang="5400000" scaled="0"/>
+        </a:gradFill>
+      </a:fillStyleLst>
+      <a:lnStyleLst>
+        <a:ln w="12700" cap="flat" cmpd="sng" algn="ctr">
+          <a:solidFill>
+            <a:schemeClr val="phClr"/>
+          </a:solidFill>
+          <a:prstDash val="solid"/>
+          <a:miter lim="800000"/>
+        </a:ln>
+        <a:ln w="19050" cap="flat" cmpd="sng" algn="ctr">
+          <a:solidFill>
+            <a:schemeClr val="phClr"/>
+          </a:solidFill>
+          <a:prstDash val="solid"/>
+          <a:miter lim="800000"/>
+        </a:ln>
+        <a:ln w="25400" cap="flat" cmpd="sng" algn="ctr">
+          <a:solidFill>
+            <a:schemeClr val="phClr"/>
+          </a:solidFill>
+          <a:prstDash val="solid"/>
+          <a:miter lim="800000"/>
+        </a:ln>
+      </a:lnStyleLst>
+      <a:effectStyleLst>
+        <a:effectStyle>
+          <a:effectLst/>
+        </a:effectStyle>
+        <a:effectStyle>
+          <a:effectLst/>
+        </a:effectStyle>
+        <a:effectStyle>
+          <a:effectLst>
+            <a:outerShdw blurRad="57150" dist="19050" dir="5400000" algn="ctr" rotWithShape="0">
+              <a:srgbClr val="000000">
+                <a:alpha val="63000"/>
+              </a:srgbClr>
+            </a:outerShdw>
+          </a:effectLst>
+        </a:effectStyle>
+      </a:effectStyleLst>
+      <a:bgFillStyleLst>
+        <a:solidFill>
+          <a:schemeClr val="phClr"/>
+        </a:solidFill>
+        <a:solidFill>
+          <a:schemeClr val="phClr">
+            <a:tint val="95000"/>
+            <a:satMod val="170000"/>
+          </a:schemeClr>
+        </a:solidFill>
+        <a:gradFill rotWithShape="1">
+          <a:gsLst>
+            <a:gs pos="0">
+              <a:schemeClr val="phClr">
+                <a:tint val="93000"/>
+                <a:satMod val="150000"/>
+                <a:shade val="98000"/>
+                <a:lumMod val="102000"/>
+              </a:schemeClr>
+            </a:gs>
+            <a:gs pos="50000">
+              <a:schemeClr val="phClr">
+                <a:tint val="98000"/>
+                <a:satMod val="130000"/>
+                <a:shade val="90000"/>
+                <a:lumMod val="103000"/>
+              </a:schemeClr>
+            </a:gs>
+            <a:gs pos="100000">
+              <a:schemeClr val="phClr">
+                <a:shade val="63000"/>
+                <a:satMod val="120000"/>
+              </a:schemeClr>
+            </a:gs>
+          </a:gsLst>
+          <a:lin ang="5400000" scaled="0"/>
+        </a:gradFill>
+      </a:bgFillStyleLst>
+    </a:fmtScheme>
+  </a:themeElements>
+  <a:objectDefaults>
+    <a:lnDef>
+      <a:spPr/>
+      <a:bodyPr/>
+      <a:lstStyle/>
+      <a:style>
+        <a:lnRef idx="2">
+          <a:schemeClr val="accent1"/>
+        </a:lnRef>
+        <a:fillRef idx="0">
+          <a:schemeClr val="accent1"/>
+        </a:fillRef>
+        <a:effectRef idx="1">
+          <a:schemeClr val="accent1"/>
+        </a:effectRef>
+        <a:fontRef idx="minor">
+          <a:schemeClr val="tx1"/>
+        </a:fontRef>
+      </a:style>
+    </a:lnDef>
+  </a:objectDefaults>
+  <a:extraClrSchemeLst/>
+  <a:extLst>
+    <a:ext uri="{05A4C25C-085E-4340-85A3-A5531E510DB2}">
+      <thm15:themeFamily xmlns:thm15="http://schemas.microsoft.com/office/thememl/2012/main" name="Office Theme" id="{2E142A2C-CD16-42D6-873A-C26D2A0506FA}" vid="{1BDDFF52-6CD6-40A5-AB3C-68EB2F1E4D0A}"/>
+    </a:ext>
+  </a:extLst>
+</a:theme>
 </file>
--- a/Clase_9/PPT/Clase09_LDA_Aplicado.pptx
+++ b/Clase_9/PPT/Clase09_LDA_Aplicado.pptx
@@ -3565,7 +3565,7 @@
         </p:nvSpPr>
         <p:spPr>
           <a:xfrm>
-            <a:off x="594360" y="4279392"/>
+            <a:off x="548640" y="4309402"/>
             <a:ext cx="3520440" cy="475488"/>
           </a:xfrm>
           <a:prstGeom prst="rect">
@@ -7852,7 +7852,7 @@
         </p:nvSpPr>
         <p:spPr>
           <a:xfrm>
-            <a:off x="4663440" y="3401568"/>
+            <a:off x="4818888" y="3536442"/>
             <a:ext cx="4160520" cy="1481328"/>
           </a:xfrm>
           <a:prstGeom prst="rect">
@@ -7884,7 +7884,7 @@
         </p:nvSpPr>
         <p:spPr>
           <a:xfrm>
-            <a:off x="4663440" y="3401568"/>
+            <a:off x="4709160" y="3566774"/>
             <a:ext cx="4160520" cy="50292"/>
           </a:xfrm>
           <a:prstGeom prst="rect">
@@ -8257,8 +8257,8 @@
         </p:nvSpPr>
         <p:spPr>
           <a:xfrm>
-            <a:off x="0" y="4754880"/>
-            <a:ext cx="9144000" cy="388620"/>
+            <a:off x="0" y="4901184"/>
+            <a:ext cx="9144000" cy="242316"/>
           </a:xfrm>
           <a:prstGeom prst="rect">
             <a:avLst/>
@@ -9139,7 +9139,7 @@
         </p:nvSpPr>
         <p:spPr>
           <a:xfrm>
-            <a:off x="256032" y="2816352"/>
+            <a:off x="283464" y="2811780"/>
             <a:ext cx="8631936" cy="2194560"/>
           </a:xfrm>
           <a:prstGeom prst="rect">
